--- a/pastoral-projects/values-in-action/downloads/Values_in_Action.pptx
+++ b/pastoral-projects/values-in-action/downloads/Values_in_Action.pptx
@@ -2887,7 +2887,7 @@
                 <a:ea typeface="Karla" pitchFamily="34" charset="-122"/>
                 <a:cs typeface="Karla" pitchFamily="34" charset="-120"/>
               </a:rPr>
-              <a:t>Everyone presents</a:t>
+              <a:t>Both tracks count</a:t>
             </a:r>
             <a:endParaRPr lang="en-US" sz="1600" dirty="0"/>
           </a:p>
@@ -3839,7 +3839,7 @@
                 <a:ea typeface="Karla" pitchFamily="34" charset="-122"/>
                 <a:cs typeface="Karla" pitchFamily="34" charset="-120"/>
               </a:rPr>
-              <a:t>Log what you did and how you’d prove it, every day for a week.</a:t>
+              <a:t>Log what you did and how you’d prove it, all week.</a:t>
             </a:r>
             <a:endParaRPr lang="en-US" sz="1300" dirty="0"/>
           </a:p>
@@ -6783,7 +6783,7 @@
                 <a:ea typeface="Karla" pitchFamily="34" charset="-122"/>
                 <a:cs typeface="Karla" pitchFamily="34" charset="-120"/>
               </a:rPr>
-              <a:t>Write this into your Project Planner, then start logging in your Tracker</a:t>
+              <a:t>Write this into your Project Planner, then start your log</a:t>
             </a:r>
             <a:endParaRPr lang="en-US" sz="1100" dirty="0"/>
           </a:p>
@@ -7160,7 +7160,7 @@
                 <a:ea typeface="Karla" pitchFamily="34" charset="-122"/>
                 <a:cs typeface="Karla" pitchFamily="34" charset="-120"/>
               </a:rPr>
-              <a:t>One row per day. Write what you did and how you’d show it, a photo you took, an object, or something a witness could confirm.</a:t>
+              <a:t>One row per day. Write what you did and how you’d show it: a photo you took, an object, or something a witness could confirm.</a:t>
             </a:r>
             <a:endParaRPr lang="en-US" sz="1300" dirty="0"/>
           </a:p>
@@ -7351,7 +7351,7 @@
                 <a:ea typeface="Karla" pitchFamily="34" charset="-122"/>
                 <a:cs typeface="Karla" pitchFamily="34" charset="-120"/>
               </a:rPr>
-              <a:t>Bring your evidence itself (a photo, an object, a witness) to presentation day. The tracker is your written record, not the proof.</a:t>
+              <a:t>Bring your evidence (a photo, an object, or the name of someone who saw it) to presentation day. The tracker is your written record, not the proof.</a:t>
             </a:r>
             <a:endParaRPr lang="en-US" sz="1400" dirty="0"/>
           </a:p>
@@ -8862,7 +8862,7 @@
                 <a:ea typeface="Karla" pitchFamily="34" charset="-122"/>
                 <a:cs typeface="Karla" pitchFamily="34" charset="-120"/>
               </a:rPr>
-              <a:t>Whenever it’s due</a:t>
+              <a:t>By presentation day</a:t>
             </a:r>
             <a:endParaRPr lang="en-US" sz="1400" dirty="0"/>
           </a:p>

--- a/pastoral-projects/values-in-action/downloads/Values_in_Action.pptx
+++ b/pastoral-projects/values-in-action/downloads/Values_in_Action.pptx
@@ -1979,9 +1979,9 @@
                 <a:solidFill>
                   <a:srgbClr val="BAAD9D"/>
                 </a:solidFill>
-                <a:latin typeface="Karla" pitchFamily="34" charset="0"/>
-                <a:ea typeface="Karla" pitchFamily="34" charset="-122"/>
-                <a:cs typeface="Karla" pitchFamily="34" charset="-120"/>
+                <a:latin typeface="Calibri" pitchFamily="34" charset="0"/>
+                <a:ea typeface="Calibri" pitchFamily="34" charset="-122"/>
+                <a:cs typeface="Calibri" pitchFamily="34" charset="-120"/>
               </a:rPr>
               <a:t>THE PASTORAL GUIDE</a:t>
             </a:r>
@@ -2018,9 +2018,9 @@
                 <a:solidFill>
                   <a:srgbClr val="CE6936"/>
                 </a:solidFill>
-                <a:latin typeface="Karla" pitchFamily="34" charset="0"/>
-                <a:ea typeface="Karla" pitchFamily="34" charset="-122"/>
-                <a:cs typeface="Karla" pitchFamily="34" charset="-120"/>
+                <a:latin typeface="Calibri" pitchFamily="34" charset="0"/>
+                <a:ea typeface="Calibri" pitchFamily="34" charset="-122"/>
+                <a:cs typeface="Calibri" pitchFamily="34" charset="-120"/>
               </a:rPr>
               <a:t>A PASTORAL PROJECTS RESOURCE</a:t>
             </a:r>
@@ -2053,13 +2053,13 @@
               <a:buNone/>
             </a:pPr>
             <a:r>
-              <a:rPr lang="en-US" sz="4400" b="1" dirty="0">
+              <a:rPr lang="en-US" sz="4400" b="0" dirty="0">
                 <a:solidFill>
                   <a:srgbClr val="896850"/>
                 </a:solidFill>
-                <a:latin typeface="Libre Caslon Display" pitchFamily="34" charset="0"/>
-                <a:ea typeface="Libre Caslon Display" pitchFamily="34" charset="-122"/>
-                <a:cs typeface="Libre Caslon Display" pitchFamily="34" charset="-120"/>
+                <a:latin typeface="Georgia" pitchFamily="34" charset="0"/>
+                <a:ea typeface="Georgia" pitchFamily="34" charset="-122"/>
+                <a:cs typeface="Georgia" pitchFamily="34" charset="-120"/>
               </a:rPr>
               <a:t>Values in Action</a:t>
             </a:r>
@@ -2096,9 +2096,9 @@
                 <a:solidFill>
                   <a:srgbClr val="D38055"/>
                 </a:solidFill>
-                <a:latin typeface="Libre Caslon Display" pitchFamily="34" charset="0"/>
-                <a:ea typeface="Libre Caslon Display" pitchFamily="34" charset="-122"/>
-                <a:cs typeface="Libre Caslon Display" pitchFamily="34" charset="-120"/>
+                <a:latin typeface="Georgia" pitchFamily="34" charset="0"/>
+                <a:ea typeface="Georgia" pitchFamily="34" charset="-122"/>
+                <a:cs typeface="Georgia" pitchFamily="34" charset="-120"/>
               </a:rPr>
               <a:t>A role model, two values, and a week of service</a:t>
             </a:r>
@@ -2135,9 +2135,9 @@
                 <a:solidFill>
                   <a:srgbClr val="A48A70"/>
                 </a:solidFill>
-                <a:latin typeface="Karla" pitchFamily="34" charset="0"/>
-                <a:ea typeface="Karla" pitchFamily="34" charset="-122"/>
-                <a:cs typeface="Karla" pitchFamily="34" charset="-120"/>
+                <a:latin typeface="Calibri" pitchFamily="34" charset="0"/>
+                <a:ea typeface="Calibri" pitchFamily="34" charset="-122"/>
+                <a:cs typeface="Calibri" pitchFamily="34" charset="-120"/>
               </a:rPr>
               <a:t>Session 1 of 2  ·  one week of logging in between (adjust the length to fit your form)</a:t>
             </a:r>
@@ -2254,9 +2254,9 @@
                 <a:solidFill>
                   <a:srgbClr val="BAAD9D"/>
                 </a:solidFill>
-                <a:latin typeface="Karla" pitchFamily="34" charset="0"/>
-                <a:ea typeface="Karla" pitchFamily="34" charset="-122"/>
-                <a:cs typeface="Karla" pitchFamily="34" charset="-120"/>
+                <a:latin typeface="Calibri" pitchFamily="34" charset="0"/>
+                <a:ea typeface="Calibri" pitchFamily="34" charset="-122"/>
+                <a:cs typeface="Calibri" pitchFamily="34" charset="-120"/>
               </a:rPr>
               <a:t>THE PASTORAL GUIDE</a:t>
             </a:r>
@@ -2293,9 +2293,9 @@
                 <a:solidFill>
                   <a:srgbClr val="CE6936"/>
                 </a:solidFill>
-                <a:latin typeface="Karla" pitchFamily="34" charset="0"/>
-                <a:ea typeface="Karla" pitchFamily="34" charset="-122"/>
-                <a:cs typeface="Karla" pitchFamily="34" charset="-120"/>
+                <a:latin typeface="Calibri" pitchFamily="34" charset="0"/>
+                <a:ea typeface="Calibri" pitchFamily="34" charset="-122"/>
+                <a:cs typeface="Calibri" pitchFamily="34" charset="-120"/>
               </a:rPr>
               <a:t>VALUES IN ACTION</a:t>
             </a:r>
@@ -2328,13 +2328,13 @@
               <a:buNone/>
             </a:pPr>
             <a:r>
-              <a:rPr lang="en-US" sz="4800" b="1" dirty="0">
+              <a:rPr lang="en-US" sz="4800" b="0" dirty="0">
                 <a:solidFill>
                   <a:srgbClr val="896850"/>
                 </a:solidFill>
-                <a:latin typeface="Libre Caslon Display" pitchFamily="34" charset="0"/>
-                <a:ea typeface="Libre Caslon Display" pitchFamily="34" charset="-122"/>
-                <a:cs typeface="Libre Caslon Display" pitchFamily="34" charset="-120"/>
+                <a:latin typeface="Georgia" pitchFamily="34" charset="0"/>
+                <a:ea typeface="Georgia" pitchFamily="34" charset="-122"/>
+                <a:cs typeface="Georgia" pitchFamily="34" charset="-120"/>
               </a:rPr>
               <a:t>Presentation Day</a:t>
             </a:r>
@@ -2371,9 +2371,9 @@
                 <a:solidFill>
                   <a:srgbClr val="CE6936"/>
                 </a:solidFill>
-                <a:latin typeface="Karla" pitchFamily="34" charset="0"/>
-                <a:ea typeface="Karla" pitchFamily="34" charset="-122"/>
-                <a:cs typeface="Karla" pitchFamily="34" charset="-120"/>
+                <a:latin typeface="Calibri" pitchFamily="34" charset="0"/>
+                <a:ea typeface="Calibri" pitchFamily="34" charset="-122"/>
+                <a:cs typeface="Calibri" pitchFamily="34" charset="-120"/>
               </a:rPr>
               <a:t>Session 2 of 2  ·  a week of Daily Practice or Lasting Change now behind you</a:t>
             </a:r>
@@ -2466,9 +2466,9 @@
                 <a:solidFill>
                   <a:srgbClr val="BAAD9D"/>
                 </a:solidFill>
-                <a:latin typeface="Karla" pitchFamily="34" charset="0"/>
-                <a:ea typeface="Karla" pitchFamily="34" charset="-122"/>
-                <a:cs typeface="Karla" pitchFamily="34" charset="-120"/>
+                <a:latin typeface="Calibri" pitchFamily="34" charset="0"/>
+                <a:ea typeface="Calibri" pitchFamily="34" charset="-122"/>
+                <a:cs typeface="Calibri" pitchFamily="34" charset="-120"/>
               </a:rPr>
               <a:t>THE PASTORAL GUIDE</a:t>
             </a:r>
@@ -2505,9 +2505,9 @@
                 <a:solidFill>
                   <a:srgbClr val="CE6936"/>
                 </a:solidFill>
-                <a:latin typeface="Karla" pitchFamily="34" charset="0"/>
-                <a:ea typeface="Karla" pitchFamily="34" charset="-122"/>
-                <a:cs typeface="Karla" pitchFamily="34" charset="-120"/>
+                <a:latin typeface="Calibri" pitchFamily="34" charset="0"/>
+                <a:ea typeface="Calibri" pitchFamily="34" charset="-122"/>
+                <a:cs typeface="Calibri" pitchFamily="34" charset="-120"/>
               </a:rPr>
               <a:t>HOUSEKEEPING</a:t>
             </a:r>
@@ -2540,13 +2540,13 @@
               <a:buNone/>
             </a:pPr>
             <a:r>
-              <a:rPr lang="en-US" sz="3200" b="1" dirty="0">
+              <a:rPr lang="en-US" sz="3200" b="0" dirty="0">
                 <a:solidFill>
                   <a:srgbClr val="896850"/>
                 </a:solidFill>
-                <a:latin typeface="Libre Caslon Display" pitchFamily="34" charset="0"/>
-                <a:ea typeface="Libre Caslon Display" pitchFamily="34" charset="-122"/>
-                <a:cs typeface="Libre Caslon Display" pitchFamily="34" charset="-120"/>
+                <a:latin typeface="Georgia" pitchFamily="34" charset="0"/>
+                <a:ea typeface="Georgia" pitchFamily="34" charset="-122"/>
+                <a:cs typeface="Georgia" pitchFamily="34" charset="-120"/>
               </a:rPr>
               <a:t>How today runs</a:t>
             </a:r>
@@ -2631,9 +2631,9 @@
                 <a:solidFill>
                   <a:srgbClr val="896850"/>
                 </a:solidFill>
-                <a:latin typeface="Karla" pitchFamily="34" charset="0"/>
-                <a:ea typeface="Karla" pitchFamily="34" charset="-122"/>
-                <a:cs typeface="Karla" pitchFamily="34" charset="-120"/>
+                <a:latin typeface="Calibri" pitchFamily="34" charset="0"/>
+                <a:ea typeface="Calibri" pitchFamily="34" charset="-122"/>
+                <a:cs typeface="Calibri" pitchFamily="34" charset="-120"/>
               </a:rPr>
               <a:t>Two minutes each</a:t>
             </a:r>
@@ -2670,9 +2670,9 @@
                 <a:solidFill>
                   <a:srgbClr val="A48A70"/>
                 </a:solidFill>
-                <a:latin typeface="Karla" pitchFamily="34" charset="0"/>
-                <a:ea typeface="Karla" pitchFamily="34" charset="-122"/>
-                <a:cs typeface="Karla" pitchFamily="34" charset="-120"/>
+                <a:latin typeface="Calibri" pitchFamily="34" charset="0"/>
+                <a:ea typeface="Calibri" pitchFamily="34" charset="-122"/>
+                <a:cs typeface="Calibri" pitchFamily="34" charset="-120"/>
               </a:rPr>
               <a:t>To the whole form, no more and no less. A gentle time signal at 90 seconds helps.</a:t>
             </a:r>
@@ -2757,9 +2757,9 @@
                 <a:solidFill>
                   <a:srgbClr val="896850"/>
                 </a:solidFill>
-                <a:latin typeface="Karla" pitchFamily="34" charset="0"/>
-                <a:ea typeface="Karla" pitchFamily="34" charset="-122"/>
-                <a:cs typeface="Karla" pitchFamily="34" charset="-120"/>
+                <a:latin typeface="Calibri" pitchFamily="34" charset="0"/>
+                <a:ea typeface="Calibri" pitchFamily="34" charset="-122"/>
+                <a:cs typeface="Calibri" pitchFamily="34" charset="-120"/>
               </a:rPr>
               <a:t>Bring your evidence</a:t>
             </a:r>
@@ -2796,9 +2796,9 @@
                 <a:solidFill>
                   <a:srgbClr val="A48A70"/>
                 </a:solidFill>
-                <a:latin typeface="Karla" pitchFamily="34" charset="0"/>
-                <a:ea typeface="Karla" pitchFamily="34" charset="-122"/>
-                <a:cs typeface="Karla" pitchFamily="34" charset="-120"/>
+                <a:latin typeface="Calibri" pitchFamily="34" charset="0"/>
+                <a:ea typeface="Calibri" pitchFamily="34" charset="-122"/>
+                <a:cs typeface="Calibri" pitchFamily="34" charset="-120"/>
               </a:rPr>
               <a:t>The actual photo, object, or thing you made, not just the tracker entry describing it.</a:t>
             </a:r>
@@ -2883,9 +2883,9 @@
                 <a:solidFill>
                   <a:srgbClr val="896850"/>
                 </a:solidFill>
-                <a:latin typeface="Karla" pitchFamily="34" charset="0"/>
-                <a:ea typeface="Karla" pitchFamily="34" charset="-122"/>
-                <a:cs typeface="Karla" pitchFamily="34" charset="-120"/>
+                <a:latin typeface="Calibri" pitchFamily="34" charset="0"/>
+                <a:ea typeface="Calibri" pitchFamily="34" charset="-122"/>
+                <a:cs typeface="Calibri" pitchFamily="34" charset="-120"/>
               </a:rPr>
               <a:t>Both tracks count</a:t>
             </a:r>
@@ -2922,9 +2922,9 @@
                 <a:solidFill>
                   <a:srgbClr val="A48A70"/>
                 </a:solidFill>
-                <a:latin typeface="Karla" pitchFamily="34" charset="0"/>
-                <a:ea typeface="Karla" pitchFamily="34" charset="-122"/>
-                <a:cs typeface="Karla" pitchFamily="34" charset="-120"/>
+                <a:latin typeface="Calibri" pitchFamily="34" charset="0"/>
+                <a:ea typeface="Calibri" pitchFamily="34" charset="-122"/>
+                <a:cs typeface="Calibri" pitchFamily="34" charset="-120"/>
               </a:rPr>
               <a:t>Both tracks are equally valid. A week of small acts is just as real as one lasting thing.</a:t>
             </a:r>
@@ -3009,9 +3009,9 @@
                 <a:solidFill>
                   <a:srgbClr val="896850"/>
                 </a:solidFill>
-                <a:latin typeface="Karla" pitchFamily="34" charset="0"/>
-                <a:ea typeface="Karla" pitchFamily="34" charset="-122"/>
-                <a:cs typeface="Karla" pitchFamily="34" charset="-120"/>
+                <a:latin typeface="Calibri" pitchFamily="34" charset="0"/>
+                <a:ea typeface="Calibri" pitchFamily="34" charset="-122"/>
+                <a:cs typeface="Calibri" pitchFamily="34" charset="-120"/>
               </a:rPr>
               <a:t>No ranking, no awards</a:t>
             </a:r>
@@ -3048,9 +3048,9 @@
                 <a:solidFill>
                   <a:srgbClr val="A48A70"/>
                 </a:solidFill>
-                <a:latin typeface="Karla" pitchFamily="34" charset="0"/>
-                <a:ea typeface="Karla" pitchFamily="34" charset="-122"/>
-                <a:cs typeface="Karla" pitchFamily="34" charset="-120"/>
+                <a:latin typeface="Calibri" pitchFamily="34" charset="0"/>
+                <a:ea typeface="Calibri" pitchFamily="34" charset="-122"/>
+                <a:cs typeface="Calibri" pitchFamily="34" charset="-120"/>
               </a:rPr>
               <a:t>This project closes with everyone’s story heard, not a competition between them.</a:t>
             </a:r>
@@ -3167,9 +3167,9 @@
                 <a:solidFill>
                   <a:srgbClr val="BAAD9D"/>
                 </a:solidFill>
-                <a:latin typeface="Karla" pitchFamily="34" charset="0"/>
-                <a:ea typeface="Karla" pitchFamily="34" charset="-122"/>
-                <a:cs typeface="Karla" pitchFamily="34" charset="-120"/>
+                <a:latin typeface="Calibri" pitchFamily="34" charset="0"/>
+                <a:ea typeface="Calibri" pitchFamily="34" charset="-122"/>
+                <a:cs typeface="Calibri" pitchFamily="34" charset="-120"/>
               </a:rPr>
               <a:t>THE PASTORAL GUIDE</a:t>
             </a:r>
@@ -3206,9 +3206,9 @@
                 <a:solidFill>
                   <a:srgbClr val="896850"/>
                 </a:solidFill>
-                <a:latin typeface="Libre Caslon Display" pitchFamily="34" charset="0"/>
-                <a:ea typeface="Libre Caslon Display" pitchFamily="34" charset="-122"/>
-                <a:cs typeface="Libre Caslon Display" pitchFamily="34" charset="-120"/>
+                <a:latin typeface="Georgia" pitchFamily="34" charset="0"/>
+                <a:ea typeface="Georgia" pitchFamily="34" charset="-122"/>
+                <a:cs typeface="Georgia" pitchFamily="34" charset="-120"/>
               </a:rPr>
               <a:t>Admiring someone is easy. Acting like them, even for a week, is the harder and better thing.</a:t>
             </a:r>
@@ -3245,9 +3245,9 @@
                 <a:solidFill>
                   <a:srgbClr val="D38055"/>
                 </a:solidFill>
-                <a:latin typeface="Karla" pitchFamily="34" charset="0"/>
-                <a:ea typeface="Karla" pitchFamily="34" charset="-122"/>
-                <a:cs typeface="Karla" pitchFamily="34" charset="-120"/>
+                <a:latin typeface="Calibri" pitchFamily="34" charset="0"/>
+                <a:ea typeface="Calibri" pitchFamily="34" charset="-122"/>
+                <a:cs typeface="Calibri" pitchFamily="34" charset="-120"/>
               </a:rPr>
               <a:t>Well done for following through on this, in your own way, all week.</a:t>
             </a:r>
@@ -3340,9 +3340,9 @@
                 <a:solidFill>
                   <a:srgbClr val="BAAD9D"/>
                 </a:solidFill>
-                <a:latin typeface="Karla" pitchFamily="34" charset="0"/>
-                <a:ea typeface="Karla" pitchFamily="34" charset="-122"/>
-                <a:cs typeface="Karla" pitchFamily="34" charset="-120"/>
+                <a:latin typeface="Calibri" pitchFamily="34" charset="0"/>
+                <a:ea typeface="Calibri" pitchFamily="34" charset="-122"/>
+                <a:cs typeface="Calibri" pitchFamily="34" charset="-120"/>
               </a:rPr>
               <a:t>THE PASTORAL GUIDE</a:t>
             </a:r>
@@ -3379,9 +3379,9 @@
                 <a:solidFill>
                   <a:srgbClr val="CE6936"/>
                 </a:solidFill>
-                <a:latin typeface="Karla" pitchFamily="34" charset="0"/>
-                <a:ea typeface="Karla" pitchFamily="34" charset="-122"/>
-                <a:cs typeface="Karla" pitchFamily="34" charset="-120"/>
+                <a:latin typeface="Calibri" pitchFamily="34" charset="0"/>
+                <a:ea typeface="Calibri" pitchFamily="34" charset="-122"/>
+                <a:cs typeface="Calibri" pitchFamily="34" charset="-120"/>
               </a:rPr>
               <a:t>SESSION 1</a:t>
             </a:r>
@@ -3414,13 +3414,13 @@
               <a:buNone/>
             </a:pPr>
             <a:r>
-              <a:rPr lang="en-US" sz="3200" b="1" dirty="0">
+              <a:rPr lang="en-US" sz="3200" b="0" dirty="0">
                 <a:solidFill>
                   <a:srgbClr val="896850"/>
                 </a:solidFill>
-                <a:latin typeface="Libre Caslon Display" pitchFamily="34" charset="0"/>
-                <a:ea typeface="Libre Caslon Display" pitchFamily="34" charset="-122"/>
-                <a:cs typeface="Libre Caslon Display" pitchFamily="34" charset="-120"/>
+                <a:latin typeface="Georgia" pitchFamily="34" charset="0"/>
+                <a:ea typeface="Georgia" pitchFamily="34" charset="-122"/>
+                <a:cs typeface="Georgia" pitchFamily="34" charset="-120"/>
               </a:rPr>
               <a:t>What we’ll cover today</a:t>
             </a:r>
@@ -3457,9 +3457,9 @@
                 <a:solidFill>
                   <a:srgbClr val="A48A70"/>
                 </a:solidFill>
-                <a:latin typeface="Karla" pitchFamily="34" charset="0"/>
-                <a:ea typeface="Karla" pitchFamily="34" charset="-122"/>
-                <a:cs typeface="Karla" pitchFamily="34" charset="-120"/>
+                <a:latin typeface="Calibri" pitchFamily="34" charset="0"/>
+                <a:ea typeface="Calibri" pitchFamily="34" charset="-122"/>
+                <a:cs typeface="Calibri" pitchFamily="34" charset="-120"/>
               </a:rPr>
               <a:t>We don’t just admire role models from a distance. We can act on what makes them worth admiring. That’s what this project is: naming it, then doing something about it, for a week.</a:t>
             </a:r>
@@ -3544,9 +3544,9 @@
                 <a:solidFill>
                   <a:srgbClr val="896850"/>
                 </a:solidFill>
-                <a:latin typeface="Karla" pitchFamily="34" charset="0"/>
-                <a:ea typeface="Karla" pitchFamily="34" charset="-122"/>
-                <a:cs typeface="Karla" pitchFamily="34" charset="-120"/>
+                <a:latin typeface="Calibri" pitchFamily="34" charset="0"/>
+                <a:ea typeface="Calibri" pitchFamily="34" charset="-122"/>
+                <a:cs typeface="Calibri" pitchFamily="34" charset="-120"/>
               </a:rPr>
               <a:t>Role models &amp; values</a:t>
             </a:r>
@@ -3583,9 +3583,9 @@
                 <a:solidFill>
                   <a:srgbClr val="A48A70"/>
                 </a:solidFill>
-                <a:latin typeface="Karla" pitchFamily="34" charset="0"/>
-                <a:ea typeface="Karla" pitchFamily="34" charset="-122"/>
-                <a:cs typeface="Karla" pitchFamily="34" charset="-120"/>
+                <a:latin typeface="Calibri" pitchFamily="34" charset="0"/>
+                <a:ea typeface="Calibri" pitchFamily="34" charset="-122"/>
+                <a:cs typeface="Calibri" pitchFamily="34" charset="-120"/>
               </a:rPr>
               <a:t>Choose someone you admire, and name two values that make them who they are.</a:t>
             </a:r>
@@ -3670,9 +3670,9 @@
                 <a:solidFill>
                   <a:srgbClr val="896850"/>
                 </a:solidFill>
-                <a:latin typeface="Karla" pitchFamily="34" charset="0"/>
-                <a:ea typeface="Karla" pitchFamily="34" charset="-122"/>
-                <a:cs typeface="Karla" pitchFamily="34" charset="-120"/>
+                <a:latin typeface="Calibri" pitchFamily="34" charset="0"/>
+                <a:ea typeface="Calibri" pitchFamily="34" charset="-122"/>
+                <a:cs typeface="Calibri" pitchFamily="34" charset="-120"/>
               </a:rPr>
               <a:t>Two ways to act</a:t>
             </a:r>
@@ -3709,9 +3709,9 @@
                 <a:solidFill>
                   <a:srgbClr val="A48A70"/>
                 </a:solidFill>
-                <a:latin typeface="Karla" pitchFamily="34" charset="0"/>
-                <a:ea typeface="Karla" pitchFamily="34" charset="-122"/>
-                <a:cs typeface="Karla" pitchFamily="34" charset="-120"/>
+                <a:latin typeface="Calibri" pitchFamily="34" charset="0"/>
+                <a:ea typeface="Calibri" pitchFamily="34" charset="-122"/>
+                <a:cs typeface="Calibri" pitchFamily="34" charset="-120"/>
               </a:rPr>
               <a:t>A small daily practice, or one lasting change you build. You choose which fits your values best.</a:t>
             </a:r>
@@ -3796,9 +3796,9 @@
                 <a:solidFill>
                   <a:srgbClr val="896850"/>
                 </a:solidFill>
-                <a:latin typeface="Karla" pitchFamily="34" charset="0"/>
-                <a:ea typeface="Karla" pitchFamily="34" charset="-122"/>
-                <a:cs typeface="Karla" pitchFamily="34" charset="-120"/>
+                <a:latin typeface="Calibri" pitchFamily="34" charset="0"/>
+                <a:ea typeface="Calibri" pitchFamily="34" charset="-122"/>
+                <a:cs typeface="Calibri" pitchFamily="34" charset="-120"/>
               </a:rPr>
               <a:t>The tracker</a:t>
             </a:r>
@@ -3835,9 +3835,9 @@
                 <a:solidFill>
                   <a:srgbClr val="A48A70"/>
                 </a:solidFill>
-                <a:latin typeface="Karla" pitchFamily="34" charset="0"/>
-                <a:ea typeface="Karla" pitchFamily="34" charset="-122"/>
-                <a:cs typeface="Karla" pitchFamily="34" charset="-120"/>
+                <a:latin typeface="Calibri" pitchFamily="34" charset="0"/>
+                <a:ea typeface="Calibri" pitchFamily="34" charset="-122"/>
+                <a:cs typeface="Calibri" pitchFamily="34" charset="-120"/>
               </a:rPr>
               <a:t>Log what you did and how you’d prove it, all week.</a:t>
             </a:r>
@@ -3922,9 +3922,9 @@
                 <a:solidFill>
                   <a:srgbClr val="896850"/>
                 </a:solidFill>
-                <a:latin typeface="Karla" pitchFamily="34" charset="0"/>
-                <a:ea typeface="Karla" pitchFamily="34" charset="-122"/>
-                <a:cs typeface="Karla" pitchFamily="34" charset="-120"/>
+                <a:latin typeface="Calibri" pitchFamily="34" charset="0"/>
+                <a:ea typeface="Calibri" pitchFamily="34" charset="-122"/>
+                <a:cs typeface="Calibri" pitchFamily="34" charset="-120"/>
               </a:rPr>
               <a:t>Presentation day</a:t>
             </a:r>
@@ -3961,9 +3961,9 @@
                 <a:solidFill>
                   <a:srgbClr val="A48A70"/>
                 </a:solidFill>
-                <a:latin typeface="Karla" pitchFamily="34" charset="0"/>
-                <a:ea typeface="Karla" pitchFamily="34" charset="-122"/>
-                <a:cs typeface="Karla" pitchFamily="34" charset="-120"/>
+                <a:latin typeface="Calibri" pitchFamily="34" charset="0"/>
+                <a:ea typeface="Calibri" pitchFamily="34" charset="-122"/>
+                <a:cs typeface="Calibri" pitchFamily="34" charset="-120"/>
               </a:rPr>
               <a:t>A two-minute presentation to the form: your role model, your values, and what you actually did.</a:t>
             </a:r>
@@ -4056,9 +4056,9 @@
                 <a:solidFill>
                   <a:srgbClr val="BAAD9D"/>
                 </a:solidFill>
-                <a:latin typeface="Karla" pitchFamily="34" charset="0"/>
-                <a:ea typeface="Karla" pitchFamily="34" charset="-122"/>
-                <a:cs typeface="Karla" pitchFamily="34" charset="-120"/>
+                <a:latin typeface="Calibri" pitchFamily="34" charset="0"/>
+                <a:ea typeface="Calibri" pitchFamily="34" charset="-122"/>
+                <a:cs typeface="Calibri" pitchFamily="34" charset="-120"/>
               </a:rPr>
               <a:t>THE PASTORAL GUIDE</a:t>
             </a:r>
@@ -4095,9 +4095,9 @@
                 <a:solidFill>
                   <a:srgbClr val="896850"/>
                 </a:solidFill>
-                <a:latin typeface="Karla" pitchFamily="34" charset="0"/>
-                <a:ea typeface="Karla" pitchFamily="34" charset="-122"/>
-                <a:cs typeface="Karla" pitchFamily="34" charset="-120"/>
+                <a:latin typeface="Calibri" pitchFamily="34" charset="0"/>
+                <a:ea typeface="Calibri" pitchFamily="34" charset="-122"/>
+                <a:cs typeface="Calibri" pitchFamily="34" charset="-120"/>
               </a:rPr>
               <a:t>ACTIVITY 1 · DO THIS NOW</a:t>
             </a:r>
@@ -4156,13 +4156,13 @@
               <a:buNone/>
             </a:pPr>
             <a:r>
-              <a:rPr lang="en-US" sz="2600" b="1" dirty="0">
+              <a:rPr lang="en-US" sz="2600" b="0" dirty="0">
                 <a:solidFill>
                   <a:srgbClr val="896850"/>
                 </a:solidFill>
-                <a:latin typeface="Libre Caslon Display" pitchFamily="34" charset="0"/>
-                <a:ea typeface="Libre Caslon Display" pitchFamily="34" charset="-122"/>
-                <a:cs typeface="Libre Caslon Display" pitchFamily="34" charset="-120"/>
+                <a:latin typeface="Georgia" pitchFamily="34" charset="0"/>
+                <a:ea typeface="Georgia" pitchFamily="34" charset="-122"/>
+                <a:cs typeface="Georgia" pitchFamily="34" charset="-120"/>
               </a:rPr>
               <a:t>Choose Your Role Model</a:t>
             </a:r>
@@ -4199,9 +4199,9 @@
                 <a:solidFill>
                   <a:srgbClr val="A48A70"/>
                 </a:solidFill>
-                <a:latin typeface="Karla" pitchFamily="34" charset="0"/>
-                <a:ea typeface="Karla" pitchFamily="34" charset="-122"/>
-                <a:cs typeface="Karla" pitchFamily="34" charset="-120"/>
+                <a:latin typeface="Calibri" pitchFamily="34" charset="0"/>
+                <a:ea typeface="Calibri" pitchFamily="34" charset="-122"/>
+                <a:cs typeface="Calibri" pitchFamily="34" charset="-120"/>
               </a:rPr>
               <a:t>There’s no wrong answer here: family, a public figure, a friend, a character. Someone whose values you actually want to live by.</a:t>
             </a:r>
@@ -4262,9 +4262,9 @@
                 <a:solidFill>
                   <a:srgbClr val="FFFFFF"/>
                 </a:solidFill>
-                <a:latin typeface="Karla" pitchFamily="34" charset="0"/>
-                <a:ea typeface="Karla" pitchFamily="34" charset="-122"/>
-                <a:cs typeface="Karla" pitchFamily="34" charset="-120"/>
+                <a:latin typeface="Calibri" pitchFamily="34" charset="0"/>
+                <a:ea typeface="Calibri" pitchFamily="34" charset="-122"/>
+                <a:cs typeface="Calibri" pitchFamily="34" charset="-120"/>
               </a:rPr>
               <a:t>1</a:t>
             </a:r>
@@ -4301,9 +4301,9 @@
                 <a:solidFill>
                   <a:srgbClr val="896850"/>
                 </a:solidFill>
-                <a:latin typeface="Karla" pitchFamily="34" charset="0"/>
-                <a:ea typeface="Karla" pitchFamily="34" charset="-122"/>
-                <a:cs typeface="Karla" pitchFamily="34" charset="-120"/>
+                <a:latin typeface="Calibri" pitchFamily="34" charset="0"/>
+                <a:ea typeface="Calibri" pitchFamily="34" charset="-122"/>
+                <a:cs typeface="Calibri" pitchFamily="34" charset="-120"/>
               </a:rPr>
               <a:t>Who is your role model, and how do you know them (personally, publicly, a book or film)?</a:t>
             </a:r>
@@ -4391,9 +4391,9 @@
                 <a:solidFill>
                   <a:srgbClr val="FFFFFF"/>
                 </a:solidFill>
-                <a:latin typeface="Karla" pitchFamily="34" charset="0"/>
-                <a:ea typeface="Karla" pitchFamily="34" charset="-122"/>
-                <a:cs typeface="Karla" pitchFamily="34" charset="-120"/>
+                <a:latin typeface="Calibri" pitchFamily="34" charset="0"/>
+                <a:ea typeface="Calibri" pitchFamily="34" charset="-122"/>
+                <a:cs typeface="Calibri" pitchFamily="34" charset="-120"/>
               </a:rPr>
               <a:t>2</a:t>
             </a:r>
@@ -4430,9 +4430,9 @@
                 <a:solidFill>
                   <a:srgbClr val="896850"/>
                 </a:solidFill>
-                <a:latin typeface="Karla" pitchFamily="34" charset="0"/>
-                <a:ea typeface="Karla" pitchFamily="34" charset="-122"/>
-                <a:cs typeface="Karla" pitchFamily="34" charset="-120"/>
+                <a:latin typeface="Calibri" pitchFamily="34" charset="0"/>
+                <a:ea typeface="Calibri" pitchFamily="34" charset="-122"/>
+                <a:cs typeface="Calibri" pitchFamily="34" charset="-120"/>
               </a:rPr>
               <a:t>What is it about them that you admire? Try to put it into words.</a:t>
             </a:r>
@@ -4469,9 +4469,9 @@
                 <a:solidFill>
                   <a:srgbClr val="CE6936"/>
                 </a:solidFill>
-                <a:latin typeface="Karla" pitchFamily="34" charset="0"/>
-                <a:ea typeface="Karla" pitchFamily="34" charset="-122"/>
-                <a:cs typeface="Karla" pitchFamily="34" charset="-120"/>
+                <a:latin typeface="Calibri" pitchFamily="34" charset="0"/>
+                <a:ea typeface="Calibri" pitchFamily="34" charset="-122"/>
+                <a:cs typeface="Calibri" pitchFamily="34" charset="-120"/>
               </a:rPr>
               <a:t>Write this into your Project Planner</a:t>
             </a:r>
@@ -4508,9 +4508,9 @@
                 <a:solidFill>
                   <a:srgbClr val="CE6936"/>
                 </a:solidFill>
-                <a:latin typeface="Karla" pitchFamily="34" charset="0"/>
-                <a:ea typeface="Karla" pitchFamily="34" charset="-122"/>
-                <a:cs typeface="Karla" pitchFamily="34" charset="-120"/>
+                <a:latin typeface="Calibri" pitchFamily="34" charset="0"/>
+                <a:ea typeface="Calibri" pitchFamily="34" charset="-122"/>
+                <a:cs typeface="Calibri" pitchFamily="34" charset="-120"/>
               </a:rPr>
               <a:t>SESSION 1</a:t>
             </a:r>
@@ -4603,9 +4603,9 @@
                 <a:solidFill>
                   <a:srgbClr val="BAAD9D"/>
                 </a:solidFill>
-                <a:latin typeface="Karla" pitchFamily="34" charset="0"/>
-                <a:ea typeface="Karla" pitchFamily="34" charset="-122"/>
-                <a:cs typeface="Karla" pitchFamily="34" charset="-120"/>
+                <a:latin typeface="Calibri" pitchFamily="34" charset="0"/>
+                <a:ea typeface="Calibri" pitchFamily="34" charset="-122"/>
+                <a:cs typeface="Calibri" pitchFamily="34" charset="-120"/>
               </a:rPr>
               <a:t>THE PASTORAL GUIDE</a:t>
             </a:r>
@@ -4642,9 +4642,9 @@
                 <a:solidFill>
                   <a:srgbClr val="CE6936"/>
                 </a:solidFill>
-                <a:latin typeface="Karla" pitchFamily="34" charset="0"/>
-                <a:ea typeface="Karla" pitchFamily="34" charset="-122"/>
-                <a:cs typeface="Karla" pitchFamily="34" charset="-120"/>
+                <a:latin typeface="Calibri" pitchFamily="34" charset="0"/>
+                <a:ea typeface="Calibri" pitchFamily="34" charset="-122"/>
+                <a:cs typeface="Calibri" pitchFamily="34" charset="-120"/>
               </a:rPr>
               <a:t>NAMING WHAT YOU ADMIRE</a:t>
             </a:r>
@@ -4677,13 +4677,13 @@
               <a:buNone/>
             </a:pPr>
             <a:r>
-              <a:rPr lang="en-US" sz="3200" b="1" dirty="0">
+              <a:rPr lang="en-US" sz="3200" b="0" dirty="0">
                 <a:solidFill>
                   <a:srgbClr val="896850"/>
                 </a:solidFill>
-                <a:latin typeface="Libre Caslon Display" pitchFamily="34" charset="0"/>
-                <a:ea typeface="Libre Caslon Display" pitchFamily="34" charset="-122"/>
-                <a:cs typeface="Libre Caslon Display" pitchFamily="34" charset="-120"/>
+                <a:latin typeface="Georgia" pitchFamily="34" charset="0"/>
+                <a:ea typeface="Georgia" pitchFamily="34" charset="-122"/>
+                <a:cs typeface="Georgia" pitchFamily="34" charset="-120"/>
               </a:rPr>
               <a:t>Choose two values</a:t>
             </a:r>
@@ -4720,9 +4720,9 @@
                 <a:solidFill>
                   <a:srgbClr val="A48A70"/>
                 </a:solidFill>
-                <a:latin typeface="Karla" pitchFamily="34" charset="0"/>
-                <a:ea typeface="Karla" pitchFamily="34" charset="-122"/>
-                <a:cs typeface="Karla" pitchFamily="34" charset="-120"/>
+                <a:latin typeface="Calibri" pitchFamily="34" charset="0"/>
+                <a:ea typeface="Calibri" pitchFamily="34" charset="-122"/>
+                <a:cs typeface="Calibri" pitchFamily="34" charset="-120"/>
               </a:rPr>
               <a:t>Now pick the two that best describe them, or use your own word if none of these quite fit.</a:t>
             </a:r>
@@ -4833,9 +4833,9 @@
                 <a:solidFill>
                   <a:srgbClr val="896850"/>
                 </a:solidFill>
-                <a:latin typeface="Karla" pitchFamily="34" charset="0"/>
-                <a:ea typeface="Karla" pitchFamily="34" charset="-122"/>
-                <a:cs typeface="Karla" pitchFamily="34" charset="-120"/>
+                <a:latin typeface="Calibri" pitchFamily="34" charset="0"/>
+                <a:ea typeface="Calibri" pitchFamily="34" charset="-122"/>
+                <a:cs typeface="Calibri" pitchFamily="34" charset="-120"/>
               </a:rPr>
               <a:t>Courage</a:t>
             </a:r>
@@ -4946,9 +4946,9 @@
                 <a:solidFill>
                   <a:srgbClr val="896850"/>
                 </a:solidFill>
-                <a:latin typeface="Karla" pitchFamily="34" charset="0"/>
-                <a:ea typeface="Karla" pitchFamily="34" charset="-122"/>
-                <a:cs typeface="Karla" pitchFamily="34" charset="-120"/>
+                <a:latin typeface="Calibri" pitchFamily="34" charset="0"/>
+                <a:ea typeface="Calibri" pitchFamily="34" charset="-122"/>
+                <a:cs typeface="Calibri" pitchFamily="34" charset="-120"/>
               </a:rPr>
               <a:t>Kindness</a:t>
             </a:r>
@@ -5059,9 +5059,9 @@
                 <a:solidFill>
                   <a:srgbClr val="896850"/>
                 </a:solidFill>
-                <a:latin typeface="Karla" pitchFamily="34" charset="0"/>
-                <a:ea typeface="Karla" pitchFamily="34" charset="-122"/>
-                <a:cs typeface="Karla" pitchFamily="34" charset="-120"/>
+                <a:latin typeface="Calibri" pitchFamily="34" charset="0"/>
+                <a:ea typeface="Calibri" pitchFamily="34" charset="-122"/>
+                <a:cs typeface="Calibri" pitchFamily="34" charset="-120"/>
               </a:rPr>
               <a:t>Honesty</a:t>
             </a:r>
@@ -5172,9 +5172,9 @@
                 <a:solidFill>
                   <a:srgbClr val="896850"/>
                 </a:solidFill>
-                <a:latin typeface="Karla" pitchFamily="34" charset="0"/>
-                <a:ea typeface="Karla" pitchFamily="34" charset="-122"/>
-                <a:cs typeface="Karla" pitchFamily="34" charset="-120"/>
+                <a:latin typeface="Calibri" pitchFamily="34" charset="0"/>
+                <a:ea typeface="Calibri" pitchFamily="34" charset="-122"/>
+                <a:cs typeface="Calibri" pitchFamily="34" charset="-120"/>
               </a:rPr>
               <a:t>Resilience</a:t>
             </a:r>
@@ -5285,9 +5285,9 @@
                 <a:solidFill>
                   <a:srgbClr val="896850"/>
                 </a:solidFill>
-                <a:latin typeface="Karla" pitchFamily="34" charset="0"/>
-                <a:ea typeface="Karla" pitchFamily="34" charset="-122"/>
-                <a:cs typeface="Karla" pitchFamily="34" charset="-120"/>
+                <a:latin typeface="Calibri" pitchFamily="34" charset="0"/>
+                <a:ea typeface="Calibri" pitchFamily="34" charset="-122"/>
+                <a:cs typeface="Calibri" pitchFamily="34" charset="-120"/>
               </a:rPr>
               <a:t>Generosity</a:t>
             </a:r>
@@ -5398,9 +5398,9 @@
                 <a:solidFill>
                   <a:srgbClr val="896850"/>
                 </a:solidFill>
-                <a:latin typeface="Karla" pitchFamily="34" charset="0"/>
-                <a:ea typeface="Karla" pitchFamily="34" charset="-122"/>
-                <a:cs typeface="Karla" pitchFamily="34" charset="-120"/>
+                <a:latin typeface="Calibri" pitchFamily="34" charset="0"/>
+                <a:ea typeface="Calibri" pitchFamily="34" charset="-122"/>
+                <a:cs typeface="Calibri" pitchFamily="34" charset="-120"/>
               </a:rPr>
               <a:t>Discipline</a:t>
             </a:r>
@@ -5511,9 +5511,9 @@
                 <a:solidFill>
                   <a:srgbClr val="896850"/>
                 </a:solidFill>
-                <a:latin typeface="Karla" pitchFamily="34" charset="0"/>
-                <a:ea typeface="Karla" pitchFamily="34" charset="-122"/>
-                <a:cs typeface="Karla" pitchFamily="34" charset="-120"/>
+                <a:latin typeface="Calibri" pitchFamily="34" charset="0"/>
+                <a:ea typeface="Calibri" pitchFamily="34" charset="-122"/>
+                <a:cs typeface="Calibri" pitchFamily="34" charset="-120"/>
               </a:rPr>
               <a:t>Leadership</a:t>
             </a:r>
@@ -5624,9 +5624,9 @@
                 <a:solidFill>
                   <a:srgbClr val="896850"/>
                 </a:solidFill>
-                <a:latin typeface="Karla" pitchFamily="34" charset="0"/>
-                <a:ea typeface="Karla" pitchFamily="34" charset="-122"/>
-                <a:cs typeface="Karla" pitchFamily="34" charset="-120"/>
+                <a:latin typeface="Calibri" pitchFamily="34" charset="0"/>
+                <a:ea typeface="Calibri" pitchFamily="34" charset="-122"/>
+                <a:cs typeface="Calibri" pitchFamily="34" charset="-120"/>
               </a:rPr>
               <a:t>Gratitude</a:t>
             </a:r>
@@ -5719,9 +5719,9 @@
                 <a:solidFill>
                   <a:srgbClr val="BAAD9D"/>
                 </a:solidFill>
-                <a:latin typeface="Karla" pitchFamily="34" charset="0"/>
-                <a:ea typeface="Karla" pitchFamily="34" charset="-122"/>
-                <a:cs typeface="Karla" pitchFamily="34" charset="-120"/>
+                <a:latin typeface="Calibri" pitchFamily="34" charset="0"/>
+                <a:ea typeface="Calibri" pitchFamily="34" charset="-122"/>
+                <a:cs typeface="Calibri" pitchFamily="34" charset="-120"/>
               </a:rPr>
               <a:t>THE PASTORAL GUIDE</a:t>
             </a:r>
@@ -5758,9 +5758,9 @@
                 <a:solidFill>
                   <a:srgbClr val="CE6936"/>
                 </a:solidFill>
-                <a:latin typeface="Karla" pitchFamily="34" charset="0"/>
-                <a:ea typeface="Karla" pitchFamily="34" charset="-122"/>
-                <a:cs typeface="Karla" pitchFamily="34" charset="-120"/>
+                <a:latin typeface="Calibri" pitchFamily="34" charset="0"/>
+                <a:ea typeface="Calibri" pitchFamily="34" charset="-122"/>
+                <a:cs typeface="Calibri" pitchFamily="34" charset="-120"/>
               </a:rPr>
               <a:t>HOW YOU’LL ACT ON YOUR VALUES</a:t>
             </a:r>
@@ -5793,13 +5793,13 @@
               <a:buNone/>
             </a:pPr>
             <a:r>
-              <a:rPr lang="en-US" sz="3200" b="1" dirty="0">
+              <a:rPr lang="en-US" sz="3200" b="0" dirty="0">
                 <a:solidFill>
                   <a:srgbClr val="896850"/>
                 </a:solidFill>
-                <a:latin typeface="Libre Caslon Display" pitchFamily="34" charset="0"/>
-                <a:ea typeface="Libre Caslon Display" pitchFamily="34" charset="-122"/>
-                <a:cs typeface="Libre Caslon Display" pitchFamily="34" charset="-120"/>
+                <a:latin typeface="Georgia" pitchFamily="34" charset="0"/>
+                <a:ea typeface="Georgia" pitchFamily="34" charset="-122"/>
+                <a:cs typeface="Georgia" pitchFamily="34" charset="-120"/>
               </a:rPr>
               <a:t>Two ways to act on it</a:t>
             </a:r>
@@ -5906,13 +5906,13 @@
               <a:buNone/>
             </a:pPr>
             <a:r>
-              <a:rPr lang="en-US" sz="1900" b="1" dirty="0">
+              <a:rPr lang="en-US" sz="1900" b="0" dirty="0">
                 <a:solidFill>
                   <a:srgbClr val="896850"/>
                 </a:solidFill>
-                <a:latin typeface="Libre Caslon Display" pitchFamily="34" charset="0"/>
-                <a:ea typeface="Libre Caslon Display" pitchFamily="34" charset="-122"/>
-                <a:cs typeface="Libre Caslon Display" pitchFamily="34" charset="-120"/>
+                <a:latin typeface="Georgia" pitchFamily="34" charset="0"/>
+                <a:ea typeface="Georgia" pitchFamily="34" charset="-122"/>
+                <a:cs typeface="Georgia" pitchFamily="34" charset="-120"/>
               </a:rPr>
               <a:t>Daily Practice</a:t>
             </a:r>
@@ -5949,9 +5949,9 @@
                 <a:solidFill>
                   <a:srgbClr val="A48A70"/>
                 </a:solidFill>
-                <a:latin typeface="Karla" pitchFamily="34" charset="0"/>
-                <a:ea typeface="Karla" pitchFamily="34" charset="-122"/>
-                <a:cs typeface="Karla" pitchFamily="34" charset="-120"/>
+                <a:latin typeface="Calibri" pitchFamily="34" charset="0"/>
+                <a:ea typeface="Calibri" pitchFamily="34" charset="-122"/>
+                <a:cs typeface="Calibri" pitchFamily="34" charset="-120"/>
               </a:rPr>
               <a:t>A small act tied to your values, repeated every day this week.</a:t>
             </a:r>
@@ -5992,9 +5992,9 @@
                 <a:solidFill>
                   <a:srgbClr val="896850"/>
                 </a:solidFill>
-                <a:latin typeface="Karla" pitchFamily="34" charset="0"/>
-                <a:ea typeface="Karla" pitchFamily="34" charset="-122"/>
-                <a:cs typeface="Karla" pitchFamily="34" charset="-120"/>
+                <a:latin typeface="Calibri" pitchFamily="34" charset="0"/>
+                <a:ea typeface="Calibri" pitchFamily="34" charset="-122"/>
+                <a:cs typeface="Calibri" pitchFamily="34" charset="-120"/>
               </a:rPr>
               <a:t>Washing the dishes every evening</a:t>
             </a:r>
@@ -6013,9 +6013,9 @@
                 <a:solidFill>
                   <a:srgbClr val="896850"/>
                 </a:solidFill>
-                <a:latin typeface="Karla" pitchFamily="34" charset="0"/>
-                <a:ea typeface="Karla" pitchFamily="34" charset="-122"/>
-                <a:cs typeface="Karla" pitchFamily="34" charset="-120"/>
+                <a:latin typeface="Calibri" pitchFamily="34" charset="0"/>
+                <a:ea typeface="Calibri" pitchFamily="34" charset="-122"/>
+                <a:cs typeface="Calibri" pitchFamily="34" charset="-120"/>
               </a:rPr>
               <a:t>Writing a friend a positivity note each day</a:t>
             </a:r>
@@ -6034,9 +6034,9 @@
                 <a:solidFill>
                   <a:srgbClr val="896850"/>
                 </a:solidFill>
-                <a:latin typeface="Karla" pitchFamily="34" charset="0"/>
-                <a:ea typeface="Karla" pitchFamily="34" charset="-122"/>
-                <a:cs typeface="Karla" pitchFamily="34" charset="-120"/>
+                <a:latin typeface="Calibri" pitchFamily="34" charset="0"/>
+                <a:ea typeface="Calibri" pitchFamily="34" charset="-122"/>
+                <a:cs typeface="Calibri" pitchFamily="34" charset="-120"/>
               </a:rPr>
               <a:t>Cooking a meal for your family</a:t>
             </a:r>
@@ -6143,13 +6143,13 @@
               <a:buNone/>
             </a:pPr>
             <a:r>
-              <a:rPr lang="en-US" sz="1900" b="1" dirty="0">
+              <a:rPr lang="en-US" sz="1900" b="0" dirty="0">
                 <a:solidFill>
                   <a:srgbClr val="896850"/>
                 </a:solidFill>
-                <a:latin typeface="Libre Caslon Display" pitchFamily="34" charset="0"/>
-                <a:ea typeface="Libre Caslon Display" pitchFamily="34" charset="-122"/>
-                <a:cs typeface="Libre Caslon Display" pitchFamily="34" charset="-120"/>
+                <a:latin typeface="Georgia" pitchFamily="34" charset="0"/>
+                <a:ea typeface="Georgia" pitchFamily="34" charset="-122"/>
+                <a:cs typeface="Georgia" pitchFamily="34" charset="-120"/>
               </a:rPr>
               <a:t>Lasting Change</a:t>
             </a:r>
@@ -6186,9 +6186,9 @@
                 <a:solidFill>
                   <a:srgbClr val="A48A70"/>
                 </a:solidFill>
-                <a:latin typeface="Karla" pitchFamily="34" charset="0"/>
-                <a:ea typeface="Karla" pitchFamily="34" charset="-122"/>
-                <a:cs typeface="Karla" pitchFamily="34" charset="-120"/>
+                <a:latin typeface="Calibri" pitchFamily="34" charset="0"/>
+                <a:ea typeface="Calibri" pitchFamily="34" charset="-122"/>
+                <a:cs typeface="Calibri" pitchFamily="34" charset="-120"/>
               </a:rPr>
               <a:t>Something you build once, that keeps giving after this week ends.</a:t>
             </a:r>
@@ -6229,9 +6229,9 @@
                 <a:solidFill>
                   <a:srgbClr val="896850"/>
                 </a:solidFill>
-                <a:latin typeface="Karla" pitchFamily="34" charset="0"/>
-                <a:ea typeface="Karla" pitchFamily="34" charset="-122"/>
-                <a:cs typeface="Karla" pitchFamily="34" charset="-120"/>
+                <a:latin typeface="Calibri" pitchFamily="34" charset="0"/>
+                <a:ea typeface="Calibri" pitchFamily="34" charset="-122"/>
+                <a:cs typeface="Calibri" pitchFamily="34" charset="-120"/>
               </a:rPr>
               <a:t>A no-questions-asked stationery basket</a:t>
             </a:r>
@@ -6250,9 +6250,9 @@
                 <a:solidFill>
                   <a:srgbClr val="896850"/>
                 </a:solidFill>
-                <a:latin typeface="Karla" pitchFamily="34" charset="0"/>
-                <a:ea typeface="Karla" pitchFamily="34" charset="-122"/>
-                <a:cs typeface="Karla" pitchFamily="34" charset="-120"/>
+                <a:latin typeface="Calibri" pitchFamily="34" charset="0"/>
+                <a:ea typeface="Calibri" pitchFamily="34" charset="-122"/>
+                <a:cs typeface="Calibri" pitchFamily="34" charset="-120"/>
               </a:rPr>
               <a:t>A class kindness noticeboard</a:t>
             </a:r>
@@ -6271,9 +6271,9 @@
                 <a:solidFill>
                   <a:srgbClr val="896850"/>
                 </a:solidFill>
-                <a:latin typeface="Karla" pitchFamily="34" charset="0"/>
-                <a:ea typeface="Karla" pitchFamily="34" charset="-122"/>
-                <a:cs typeface="Karla" pitchFamily="34" charset="-120"/>
+                <a:latin typeface="Calibri" pitchFamily="34" charset="0"/>
+                <a:ea typeface="Calibri" pitchFamily="34" charset="-122"/>
+                <a:cs typeface="Calibri" pitchFamily="34" charset="-120"/>
               </a:rPr>
               <a:t>A lending shelf for revision guides</a:t>
             </a:r>
@@ -6366,9 +6366,9 @@
                 <a:solidFill>
                   <a:srgbClr val="BAAD9D"/>
                 </a:solidFill>
-                <a:latin typeface="Karla" pitchFamily="34" charset="0"/>
-                <a:ea typeface="Karla" pitchFamily="34" charset="-122"/>
-                <a:cs typeface="Karla" pitchFamily="34" charset="-120"/>
+                <a:latin typeface="Calibri" pitchFamily="34" charset="0"/>
+                <a:ea typeface="Calibri" pitchFamily="34" charset="-122"/>
+                <a:cs typeface="Calibri" pitchFamily="34" charset="-120"/>
               </a:rPr>
               <a:t>THE PASTORAL GUIDE</a:t>
             </a:r>
@@ -6405,9 +6405,9 @@
                 <a:solidFill>
                   <a:srgbClr val="896850"/>
                 </a:solidFill>
-                <a:latin typeface="Karla" pitchFamily="34" charset="0"/>
-                <a:ea typeface="Karla" pitchFamily="34" charset="-122"/>
-                <a:cs typeface="Karla" pitchFamily="34" charset="-120"/>
+                <a:latin typeface="Calibri" pitchFamily="34" charset="0"/>
+                <a:ea typeface="Calibri" pitchFamily="34" charset="-122"/>
+                <a:cs typeface="Calibri" pitchFamily="34" charset="-120"/>
               </a:rPr>
               <a:t>ACTIVITY 2 · DO THIS NOW</a:t>
             </a:r>
@@ -6466,13 +6466,13 @@
               <a:buNone/>
             </a:pPr>
             <a:r>
-              <a:rPr lang="en-US" sz="2600" b="1" dirty="0">
+              <a:rPr lang="en-US" sz="2600" b="0" dirty="0">
                 <a:solidFill>
                   <a:srgbClr val="896850"/>
                 </a:solidFill>
-                <a:latin typeface="Libre Caslon Display" pitchFamily="34" charset="0"/>
-                <a:ea typeface="Libre Caslon Display" pitchFamily="34" charset="-122"/>
-                <a:cs typeface="Libre Caslon Display" pitchFamily="34" charset="-120"/>
+                <a:latin typeface="Georgia" pitchFamily="34" charset="0"/>
+                <a:ea typeface="Georgia" pitchFamily="34" charset="-122"/>
+                <a:cs typeface="Georgia" pitchFamily="34" charset="-120"/>
               </a:rPr>
               <a:t>Commit Your Plan</a:t>
             </a:r>
@@ -6509,9 +6509,9 @@
                 <a:solidFill>
                   <a:srgbClr val="A48A70"/>
                 </a:solidFill>
-                <a:latin typeface="Karla" pitchFamily="34" charset="0"/>
-                <a:ea typeface="Karla" pitchFamily="34" charset="-122"/>
-                <a:cs typeface="Karla" pitchFamily="34" charset="-120"/>
+                <a:latin typeface="Calibri" pitchFamily="34" charset="0"/>
+                <a:ea typeface="Calibri" pitchFamily="34" charset="-122"/>
+                <a:cs typeface="Calibri" pitchFamily="34" charset="-120"/>
               </a:rPr>
               <a:t>You’ve named your role model and their values. Now decide how you’ll actually act on them this week.</a:t>
             </a:r>
@@ -6572,9 +6572,9 @@
                 <a:solidFill>
                   <a:srgbClr val="FFFFFF"/>
                 </a:solidFill>
-                <a:latin typeface="Karla" pitchFamily="34" charset="0"/>
-                <a:ea typeface="Karla" pitchFamily="34" charset="-122"/>
-                <a:cs typeface="Karla" pitchFamily="34" charset="-120"/>
+                <a:latin typeface="Calibri" pitchFamily="34" charset="0"/>
+                <a:ea typeface="Calibri" pitchFamily="34" charset="-122"/>
+                <a:cs typeface="Calibri" pitchFamily="34" charset="-120"/>
               </a:rPr>
               <a:t>1</a:t>
             </a:r>
@@ -6611,9 +6611,9 @@
                 <a:solidFill>
                   <a:srgbClr val="896850"/>
                 </a:solidFill>
-                <a:latin typeface="Karla" pitchFamily="34" charset="0"/>
-                <a:ea typeface="Karla" pitchFamily="34" charset="-122"/>
-                <a:cs typeface="Karla" pitchFamily="34" charset="-120"/>
+                <a:latin typeface="Calibri" pitchFamily="34" charset="0"/>
+                <a:ea typeface="Calibri" pitchFamily="34" charset="-122"/>
+                <a:cs typeface="Calibri" pitchFamily="34" charset="-120"/>
               </a:rPr>
               <a:t>Which track will you take: Daily Practice or Lasting Change?</a:t>
             </a:r>
@@ -6701,9 +6701,9 @@
                 <a:solidFill>
                   <a:srgbClr val="FFFFFF"/>
                 </a:solidFill>
-                <a:latin typeface="Karla" pitchFamily="34" charset="0"/>
-                <a:ea typeface="Karla" pitchFamily="34" charset="-122"/>
-                <a:cs typeface="Karla" pitchFamily="34" charset="-120"/>
+                <a:latin typeface="Calibri" pitchFamily="34" charset="0"/>
+                <a:ea typeface="Calibri" pitchFamily="34" charset="-122"/>
+                <a:cs typeface="Calibri" pitchFamily="34" charset="-120"/>
               </a:rPr>
               <a:t>2</a:t>
             </a:r>
@@ -6740,9 +6740,9 @@
                 <a:solidFill>
                   <a:srgbClr val="896850"/>
                 </a:solidFill>
-                <a:latin typeface="Karla" pitchFamily="34" charset="0"/>
-                <a:ea typeface="Karla" pitchFamily="34" charset="-122"/>
-                <a:cs typeface="Karla" pitchFamily="34" charset="-120"/>
+                <a:latin typeface="Calibri" pitchFamily="34" charset="0"/>
+                <a:ea typeface="Calibri" pitchFamily="34" charset="-122"/>
+                <a:cs typeface="Calibri" pitchFamily="34" charset="-120"/>
               </a:rPr>
               <a:t>What, specifically, will you do this week? Be precise, not vague.</a:t>
             </a:r>
@@ -6779,9 +6779,9 @@
                 <a:solidFill>
                   <a:srgbClr val="CE6936"/>
                 </a:solidFill>
-                <a:latin typeface="Karla" pitchFamily="34" charset="0"/>
-                <a:ea typeface="Karla" pitchFamily="34" charset="-122"/>
-                <a:cs typeface="Karla" pitchFamily="34" charset="-120"/>
+                <a:latin typeface="Calibri" pitchFamily="34" charset="0"/>
+                <a:ea typeface="Calibri" pitchFamily="34" charset="-122"/>
+                <a:cs typeface="Calibri" pitchFamily="34" charset="-120"/>
               </a:rPr>
               <a:t>Write this into your Project Planner, then start your log</a:t>
             </a:r>
@@ -6818,9 +6818,9 @@
                 <a:solidFill>
                   <a:srgbClr val="CE6936"/>
                 </a:solidFill>
-                <a:latin typeface="Karla" pitchFamily="34" charset="0"/>
-                <a:ea typeface="Karla" pitchFamily="34" charset="-122"/>
-                <a:cs typeface="Karla" pitchFamily="34" charset="-120"/>
+                <a:latin typeface="Calibri" pitchFamily="34" charset="0"/>
+                <a:ea typeface="Calibri" pitchFamily="34" charset="-122"/>
+                <a:cs typeface="Calibri" pitchFamily="34" charset="-120"/>
               </a:rPr>
               <a:t>SESSION 1</a:t>
             </a:r>
@@ -6913,9 +6913,9 @@
                 <a:solidFill>
                   <a:srgbClr val="BAAD9D"/>
                 </a:solidFill>
-                <a:latin typeface="Karla" pitchFamily="34" charset="0"/>
-                <a:ea typeface="Karla" pitchFamily="34" charset="-122"/>
-                <a:cs typeface="Karla" pitchFamily="34" charset="-120"/>
+                <a:latin typeface="Calibri" pitchFamily="34" charset="0"/>
+                <a:ea typeface="Calibri" pitchFamily="34" charset="-122"/>
+                <a:cs typeface="Calibri" pitchFamily="34" charset="-120"/>
               </a:rPr>
               <a:t>THE PASTORAL GUIDE</a:t>
             </a:r>
@@ -6952,9 +6952,9 @@
                 <a:solidFill>
                   <a:srgbClr val="CE6936"/>
                 </a:solidFill>
-                <a:latin typeface="Karla" pitchFamily="34" charset="0"/>
-                <a:ea typeface="Karla" pitchFamily="34" charset="-122"/>
-                <a:cs typeface="Karla" pitchFamily="34" charset="-120"/>
+                <a:latin typeface="Calibri" pitchFamily="34" charset="0"/>
+                <a:ea typeface="Calibri" pitchFamily="34" charset="-122"/>
+                <a:cs typeface="Calibri" pitchFamily="34" charset="-120"/>
               </a:rPr>
               <a:t>FROM TODAY</a:t>
             </a:r>
@@ -6987,13 +6987,13 @@
               <a:buNone/>
             </a:pPr>
             <a:r>
-              <a:rPr lang="en-US" sz="3000" b="1" dirty="0">
+              <a:rPr lang="en-US" sz="3000" b="0" dirty="0">
                 <a:solidFill>
                   <a:srgbClr val="896850"/>
                 </a:solidFill>
-                <a:latin typeface="Libre Caslon Display" pitchFamily="34" charset="0"/>
-                <a:ea typeface="Libre Caslon Display" pitchFamily="34" charset="-122"/>
-                <a:cs typeface="Libre Caslon Display" pitchFamily="34" charset="-120"/>
+                <a:latin typeface="Georgia" pitchFamily="34" charset="0"/>
+                <a:ea typeface="Georgia" pitchFamily="34" charset="-122"/>
+                <a:cs typeface="Georgia" pitchFamily="34" charset="-120"/>
               </a:rPr>
               <a:t>Introducing your Tracker</a:t>
             </a:r>
@@ -7030,9 +7030,9 @@
                 <a:solidFill>
                   <a:srgbClr val="A48A70"/>
                 </a:solidFill>
-                <a:latin typeface="Karla" pitchFamily="34" charset="0"/>
-                <a:ea typeface="Karla" pitchFamily="34" charset="-122"/>
-                <a:cs typeface="Karla" pitchFamily="34" charset="-120"/>
+                <a:latin typeface="Calibri" pitchFamily="34" charset="0"/>
+                <a:ea typeface="Calibri" pitchFamily="34" charset="-122"/>
+                <a:cs typeface="Calibri" pitchFamily="34" charset="-120"/>
               </a:rPr>
               <a:t>Every entry needs evidence, not just a tick: a sentence that shows what you actually did.</a:t>
             </a:r>
@@ -7117,9 +7117,9 @@
                 <a:solidFill>
                   <a:srgbClr val="896850"/>
                 </a:solidFill>
-                <a:latin typeface="Karla" pitchFamily="34" charset="0"/>
-                <a:ea typeface="Karla" pitchFamily="34" charset="-122"/>
-                <a:cs typeface="Karla" pitchFamily="34" charset="-120"/>
+                <a:latin typeface="Calibri" pitchFamily="34" charset="0"/>
+                <a:ea typeface="Calibri" pitchFamily="34" charset="-122"/>
+                <a:cs typeface="Calibri" pitchFamily="34" charset="-120"/>
               </a:rPr>
               <a:t>Daily Practice: a day-by-day log</a:t>
             </a:r>
@@ -7156,9 +7156,9 @@
                 <a:solidFill>
                   <a:srgbClr val="A48A70"/>
                 </a:solidFill>
-                <a:latin typeface="Karla" pitchFamily="34" charset="0"/>
-                <a:ea typeface="Karla" pitchFamily="34" charset="-122"/>
-                <a:cs typeface="Karla" pitchFamily="34" charset="-120"/>
+                <a:latin typeface="Calibri" pitchFamily="34" charset="0"/>
+                <a:ea typeface="Calibri" pitchFamily="34" charset="-122"/>
+                <a:cs typeface="Calibri" pitchFamily="34" charset="-120"/>
               </a:rPr>
               <a:t>One row per day. Write what you did and how you’d show it: a photo you took, an object, or something a witness could confirm.</a:t>
             </a:r>
@@ -7243,9 +7243,9 @@
                 <a:solidFill>
                   <a:srgbClr val="896850"/>
                 </a:solidFill>
-                <a:latin typeface="Karla" pitchFamily="34" charset="0"/>
-                <a:ea typeface="Karla" pitchFamily="34" charset="-122"/>
-                <a:cs typeface="Karla" pitchFamily="34" charset="-120"/>
+                <a:latin typeface="Calibri" pitchFamily="34" charset="0"/>
+                <a:ea typeface="Calibri" pitchFamily="34" charset="-122"/>
+                <a:cs typeface="Calibri" pitchFamily="34" charset="-120"/>
               </a:rPr>
               <a:t>Lasting Change: a milestone log</a:t>
             </a:r>
@@ -7282,9 +7282,9 @@
                 <a:solidFill>
                   <a:srgbClr val="A48A70"/>
                 </a:solidFill>
-                <a:latin typeface="Karla" pitchFamily="34" charset="0"/>
-                <a:ea typeface="Karla" pitchFamily="34" charset="-122"/>
-                <a:cs typeface="Karla" pitchFamily="34" charset="-120"/>
+                <a:latin typeface="Calibri" pitchFamily="34" charset="0"/>
+                <a:ea typeface="Calibri" pitchFamily="34" charset="-122"/>
+                <a:cs typeface="Calibri" pitchFamily="34" charset="-120"/>
               </a:rPr>
               <a:t>Log each stage instead: planned, built, launched, and the first response you got.</a:t>
             </a:r>
@@ -7347,9 +7347,9 @@
                 <a:solidFill>
                   <a:srgbClr val="D38055"/>
                 </a:solidFill>
-                <a:latin typeface="Karla" pitchFamily="34" charset="0"/>
-                <a:ea typeface="Karla" pitchFamily="34" charset="-122"/>
-                <a:cs typeface="Karla" pitchFamily="34" charset="-120"/>
+                <a:latin typeface="Calibri" pitchFamily="34" charset="0"/>
+                <a:ea typeface="Calibri" pitchFamily="34" charset="-122"/>
+                <a:cs typeface="Calibri" pitchFamily="34" charset="-120"/>
               </a:rPr>
               <a:t>Bring your evidence (a photo, an object, or the name of someone who saw it) to presentation day. The tracker is your written record, not the proof.</a:t>
             </a:r>
@@ -7442,9 +7442,9 @@
                 <a:solidFill>
                   <a:srgbClr val="BAAD9D"/>
                 </a:solidFill>
-                <a:latin typeface="Karla" pitchFamily="34" charset="0"/>
-                <a:ea typeface="Karla" pitchFamily="34" charset="-122"/>
-                <a:cs typeface="Karla" pitchFamily="34" charset="-120"/>
+                <a:latin typeface="Calibri" pitchFamily="34" charset="0"/>
+                <a:ea typeface="Calibri" pitchFamily="34" charset="-122"/>
+                <a:cs typeface="Calibri" pitchFamily="34" charset="-120"/>
               </a:rPr>
               <a:t>THE PASTORAL GUIDE</a:t>
             </a:r>
@@ -7481,9 +7481,9 @@
                 <a:solidFill>
                   <a:srgbClr val="CE6936"/>
                 </a:solidFill>
-                <a:latin typeface="Karla" pitchFamily="34" charset="0"/>
-                <a:ea typeface="Karla" pitchFamily="34" charset="-122"/>
-                <a:cs typeface="Karla" pitchFamily="34" charset="-120"/>
+                <a:latin typeface="Calibri" pitchFamily="34" charset="0"/>
+                <a:ea typeface="Calibri" pitchFamily="34" charset="-122"/>
+                <a:cs typeface="Calibri" pitchFamily="34" charset="-120"/>
               </a:rPr>
               <a:t>WHAT’S COMING</a:t>
             </a:r>
@@ -7516,13 +7516,13 @@
               <a:buNone/>
             </a:pPr>
             <a:r>
-              <a:rPr lang="en-US" sz="3200" b="1" dirty="0">
+              <a:rPr lang="en-US" sz="3200" b="0" dirty="0">
                 <a:solidFill>
                   <a:srgbClr val="896850"/>
                 </a:solidFill>
-                <a:latin typeface="Libre Caslon Display" pitchFamily="34" charset="0"/>
-                <a:ea typeface="Libre Caslon Display" pitchFamily="34" charset="-122"/>
-                <a:cs typeface="Libre Caslon Display" pitchFamily="34" charset="-120"/>
+                <a:latin typeface="Georgia" pitchFamily="34" charset="0"/>
+                <a:ea typeface="Georgia" pitchFamily="34" charset="-122"/>
+                <a:cs typeface="Georgia" pitchFamily="34" charset="-120"/>
               </a:rPr>
               <a:t>Presentation day</a:t>
             </a:r>
@@ -7559,9 +7559,9 @@
                 <a:solidFill>
                   <a:srgbClr val="A48A70"/>
                 </a:solidFill>
-                <a:latin typeface="Karla" pitchFamily="34" charset="0"/>
-                <a:ea typeface="Karla" pitchFamily="34" charset="-122"/>
-                <a:cs typeface="Karla" pitchFamily="34" charset="-120"/>
+                <a:latin typeface="Calibri" pitchFamily="34" charset="0"/>
+                <a:ea typeface="Calibri" pitchFamily="34" charset="-122"/>
+                <a:cs typeface="Calibri" pitchFamily="34" charset="-120"/>
               </a:rPr>
               <a:t>Two minutes, to the whole form. You build your own presentation, however you like: slides, cue cards, or just talking. Cover these five things:</a:t>
             </a:r>
@@ -7672,9 +7672,9 @@
                 <a:solidFill>
                   <a:srgbClr val="896850"/>
                 </a:solidFill>
-                <a:latin typeface="Karla" pitchFamily="34" charset="0"/>
-                <a:ea typeface="Karla" pitchFamily="34" charset="-122"/>
-                <a:cs typeface="Karla" pitchFamily="34" charset="-120"/>
+                <a:latin typeface="Calibri" pitchFamily="34" charset="0"/>
+                <a:ea typeface="Calibri" pitchFamily="34" charset="-122"/>
+                <a:cs typeface="Calibri" pitchFamily="34" charset="-120"/>
               </a:rPr>
               <a:t>Role model</a:t>
             </a:r>
@@ -7711,9 +7711,9 @@
                 <a:solidFill>
                   <a:srgbClr val="A48A70"/>
                 </a:solidFill>
-                <a:latin typeface="Karla" pitchFamily="34" charset="0"/>
-                <a:ea typeface="Karla" pitchFamily="34" charset="-122"/>
-                <a:cs typeface="Karla" pitchFamily="34" charset="-120"/>
+                <a:latin typeface="Calibri" pitchFamily="34" charset="0"/>
+                <a:ea typeface="Calibri" pitchFamily="34" charset="-122"/>
+                <a:cs typeface="Calibri" pitchFamily="34" charset="-120"/>
               </a:rPr>
               <a:t>Who, and why them.</a:t>
             </a:r>
@@ -7824,9 +7824,9 @@
                 <a:solidFill>
                   <a:srgbClr val="896850"/>
                 </a:solidFill>
-                <a:latin typeface="Karla" pitchFamily="34" charset="0"/>
-                <a:ea typeface="Karla" pitchFamily="34" charset="-122"/>
-                <a:cs typeface="Karla" pitchFamily="34" charset="-120"/>
+                <a:latin typeface="Calibri" pitchFamily="34" charset="0"/>
+                <a:ea typeface="Calibri" pitchFamily="34" charset="-122"/>
+                <a:cs typeface="Calibri" pitchFamily="34" charset="-120"/>
               </a:rPr>
               <a:t>Values</a:t>
             </a:r>
@@ -7863,9 +7863,9 @@
                 <a:solidFill>
                   <a:srgbClr val="A48A70"/>
                 </a:solidFill>
-                <a:latin typeface="Karla" pitchFamily="34" charset="0"/>
-                <a:ea typeface="Karla" pitchFamily="34" charset="-122"/>
-                <a:cs typeface="Karla" pitchFamily="34" charset="-120"/>
+                <a:latin typeface="Calibri" pitchFamily="34" charset="0"/>
+                <a:ea typeface="Calibri" pitchFamily="34" charset="-122"/>
+                <a:cs typeface="Calibri" pitchFamily="34" charset="-120"/>
               </a:rPr>
               <a:t>The two you chose.</a:t>
             </a:r>
@@ -7976,9 +7976,9 @@
                 <a:solidFill>
                   <a:srgbClr val="896850"/>
                 </a:solidFill>
-                <a:latin typeface="Karla" pitchFamily="34" charset="0"/>
-                <a:ea typeface="Karla" pitchFamily="34" charset="-122"/>
-                <a:cs typeface="Karla" pitchFamily="34" charset="-120"/>
+                <a:latin typeface="Calibri" pitchFamily="34" charset="0"/>
+                <a:ea typeface="Calibri" pitchFamily="34" charset="-122"/>
+                <a:cs typeface="Calibri" pitchFamily="34" charset="-120"/>
               </a:rPr>
               <a:t>Service</a:t>
             </a:r>
@@ -8015,9 +8015,9 @@
                 <a:solidFill>
                   <a:srgbClr val="A48A70"/>
                 </a:solidFill>
-                <a:latin typeface="Karla" pitchFamily="34" charset="0"/>
-                <a:ea typeface="Karla" pitchFamily="34" charset="-122"/>
-                <a:cs typeface="Karla" pitchFamily="34" charset="-120"/>
+                <a:latin typeface="Calibri" pitchFamily="34" charset="0"/>
+                <a:ea typeface="Calibri" pitchFamily="34" charset="-122"/>
+                <a:cs typeface="Calibri" pitchFamily="34" charset="-120"/>
               </a:rPr>
               <a:t>What you did, and your track.</a:t>
             </a:r>
@@ -8128,9 +8128,9 @@
                 <a:solidFill>
                   <a:srgbClr val="896850"/>
                 </a:solidFill>
-                <a:latin typeface="Karla" pitchFamily="34" charset="0"/>
-                <a:ea typeface="Karla" pitchFamily="34" charset="-122"/>
-                <a:cs typeface="Karla" pitchFamily="34" charset="-120"/>
+                <a:latin typeface="Calibri" pitchFamily="34" charset="0"/>
+                <a:ea typeface="Calibri" pitchFamily="34" charset="-122"/>
+                <a:cs typeface="Calibri" pitchFamily="34" charset="-120"/>
               </a:rPr>
               <a:t>Evidence</a:t>
             </a:r>
@@ -8167,9 +8167,9 @@
                 <a:solidFill>
                   <a:srgbClr val="A48A70"/>
                 </a:solidFill>
-                <a:latin typeface="Karla" pitchFamily="34" charset="0"/>
-                <a:ea typeface="Karla" pitchFamily="34" charset="-122"/>
-                <a:cs typeface="Karla" pitchFamily="34" charset="-120"/>
+                <a:latin typeface="Calibri" pitchFamily="34" charset="0"/>
+                <a:ea typeface="Calibri" pitchFamily="34" charset="-122"/>
+                <a:cs typeface="Calibri" pitchFamily="34" charset="-120"/>
               </a:rPr>
               <a:t>Show it, don’t just describe it.</a:t>
             </a:r>
@@ -8280,9 +8280,9 @@
                 <a:solidFill>
                   <a:srgbClr val="896850"/>
                 </a:solidFill>
-                <a:latin typeface="Karla" pitchFamily="34" charset="0"/>
-                <a:ea typeface="Karla" pitchFamily="34" charset="-122"/>
-                <a:cs typeface="Karla" pitchFamily="34" charset="-120"/>
+                <a:latin typeface="Calibri" pitchFamily="34" charset="0"/>
+                <a:ea typeface="Calibri" pitchFamily="34" charset="-122"/>
+                <a:cs typeface="Calibri" pitchFamily="34" charset="-120"/>
               </a:rPr>
               <a:t>Reflection</a:t>
             </a:r>
@@ -8319,9 +8319,9 @@
                 <a:solidFill>
                   <a:srgbClr val="A48A70"/>
                 </a:solidFill>
-                <a:latin typeface="Karla" pitchFamily="34" charset="0"/>
-                <a:ea typeface="Karla" pitchFamily="34" charset="-122"/>
-                <a:cs typeface="Karla" pitchFamily="34" charset="-120"/>
+                <a:latin typeface="Calibri" pitchFamily="34" charset="0"/>
+                <a:ea typeface="Calibri" pitchFamily="34" charset="-122"/>
+                <a:cs typeface="Calibri" pitchFamily="34" charset="-120"/>
               </a:rPr>
               <a:t>What it felt like, what’s next.</a:t>
             </a:r>
@@ -8414,9 +8414,9 @@
                 <a:solidFill>
                   <a:srgbClr val="BAAD9D"/>
                 </a:solidFill>
-                <a:latin typeface="Karla" pitchFamily="34" charset="0"/>
-                <a:ea typeface="Karla" pitchFamily="34" charset="-122"/>
-                <a:cs typeface="Karla" pitchFamily="34" charset="-120"/>
+                <a:latin typeface="Calibri" pitchFamily="34" charset="0"/>
+                <a:ea typeface="Calibri" pitchFamily="34" charset="-122"/>
+                <a:cs typeface="Calibri" pitchFamily="34" charset="-120"/>
               </a:rPr>
               <a:t>THE PASTORAL GUIDE</a:t>
             </a:r>
@@ -8453,9 +8453,9 @@
                 <a:solidFill>
                   <a:srgbClr val="CE6936"/>
                 </a:solidFill>
-                <a:latin typeface="Karla" pitchFamily="34" charset="0"/>
-                <a:ea typeface="Karla" pitchFamily="34" charset="-122"/>
-                <a:cs typeface="Karla" pitchFamily="34" charset="-120"/>
+                <a:latin typeface="Calibri" pitchFamily="34" charset="0"/>
+                <a:ea typeface="Calibri" pitchFamily="34" charset="-122"/>
+                <a:cs typeface="Calibri" pitchFamily="34" charset="-120"/>
               </a:rPr>
               <a:t>SESSION 1 · WRAP-UP</a:t>
             </a:r>
@@ -8488,13 +8488,13 @@
               <a:buNone/>
             </a:pPr>
             <a:r>
-              <a:rPr lang="en-US" sz="3200" b="1" dirty="0">
+              <a:rPr lang="en-US" sz="3200" b="0" dirty="0">
                 <a:solidFill>
                   <a:srgbClr val="896850"/>
                 </a:solidFill>
-                <a:latin typeface="Libre Caslon Display" pitchFamily="34" charset="0"/>
-                <a:ea typeface="Libre Caslon Display" pitchFamily="34" charset="-122"/>
-                <a:cs typeface="Libre Caslon Display" pitchFamily="34" charset="-120"/>
+                <a:latin typeface="Georgia" pitchFamily="34" charset="0"/>
+                <a:ea typeface="Georgia" pitchFamily="34" charset="-122"/>
+                <a:cs typeface="Georgia" pitchFamily="34" charset="-120"/>
               </a:rPr>
               <a:t>This week at a glance</a:t>
             </a:r>
@@ -8606,9 +8606,9 @@
                 <a:solidFill>
                   <a:srgbClr val="896850"/>
                 </a:solidFill>
-                <a:latin typeface="Karla" pitchFamily="34" charset="0"/>
-                <a:ea typeface="Karla" pitchFamily="34" charset="-122"/>
-                <a:cs typeface="Karla" pitchFamily="34" charset="-120"/>
+                <a:latin typeface="Calibri" pitchFamily="34" charset="0"/>
+                <a:ea typeface="Calibri" pitchFamily="34" charset="-122"/>
+                <a:cs typeface="Calibri" pitchFamily="34" charset="-120"/>
               </a:rPr>
               <a:t>Today</a:t>
             </a:r>
@@ -8645,9 +8645,9 @@
                 <a:solidFill>
                   <a:srgbClr val="A48A70"/>
                 </a:solidFill>
-                <a:latin typeface="Karla" pitchFamily="34" charset="0"/>
-                <a:ea typeface="Karla" pitchFamily="34" charset="-122"/>
-                <a:cs typeface="Karla" pitchFamily="34" charset="-120"/>
+                <a:latin typeface="Calibri" pitchFamily="34" charset="0"/>
+                <a:ea typeface="Calibri" pitchFamily="34" charset="-122"/>
+                <a:cs typeface="Calibri" pitchFamily="34" charset="-120"/>
               </a:rPr>
               <a:t>Role model, values, track and first log entry done</a:t>
             </a:r>
@@ -8732,9 +8732,9 @@
                 <a:solidFill>
                   <a:srgbClr val="896850"/>
                 </a:solidFill>
-                <a:latin typeface="Karla" pitchFamily="34" charset="0"/>
-                <a:ea typeface="Karla" pitchFamily="34" charset="-122"/>
-                <a:cs typeface="Karla" pitchFamily="34" charset="-120"/>
+                <a:latin typeface="Calibri" pitchFamily="34" charset="0"/>
+                <a:ea typeface="Calibri" pitchFamily="34" charset="-122"/>
+                <a:cs typeface="Calibri" pitchFamily="34" charset="-120"/>
               </a:rPr>
               <a:t>Every day</a:t>
             </a:r>
@@ -8771,9 +8771,9 @@
                 <a:solidFill>
                   <a:srgbClr val="A48A70"/>
                 </a:solidFill>
-                <a:latin typeface="Karla" pitchFamily="34" charset="0"/>
-                <a:ea typeface="Karla" pitchFamily="34" charset="-122"/>
-                <a:cs typeface="Karla" pitchFamily="34" charset="-120"/>
+                <a:latin typeface="Calibri" pitchFamily="34" charset="0"/>
+                <a:ea typeface="Calibri" pitchFamily="34" charset="-122"/>
+                <a:cs typeface="Calibri" pitchFamily="34" charset="-120"/>
               </a:rPr>
               <a:t>Log what you did, with evidence</a:t>
             </a:r>
@@ -8858,9 +8858,9 @@
                 <a:solidFill>
                   <a:srgbClr val="896850"/>
                 </a:solidFill>
-                <a:latin typeface="Karla" pitchFamily="34" charset="0"/>
-                <a:ea typeface="Karla" pitchFamily="34" charset="-122"/>
-                <a:cs typeface="Karla" pitchFamily="34" charset="-120"/>
+                <a:latin typeface="Calibri" pitchFamily="34" charset="0"/>
+                <a:ea typeface="Calibri" pitchFamily="34" charset="-122"/>
+                <a:cs typeface="Calibri" pitchFamily="34" charset="-120"/>
               </a:rPr>
               <a:t>By presentation day</a:t>
             </a:r>
@@ -8897,9 +8897,9 @@
                 <a:solidFill>
                   <a:srgbClr val="A48A70"/>
                 </a:solidFill>
-                <a:latin typeface="Karla" pitchFamily="34" charset="0"/>
-                <a:ea typeface="Karla" pitchFamily="34" charset="-122"/>
-                <a:cs typeface="Karla" pitchFamily="34" charset="-120"/>
+                <a:latin typeface="Calibri" pitchFamily="34" charset="0"/>
+                <a:ea typeface="Calibri" pitchFamily="34" charset="-122"/>
+                <a:cs typeface="Calibri" pitchFamily="34" charset="-120"/>
               </a:rPr>
               <a:t>Lasting Change: finish building or launching</a:t>
             </a:r>
@@ -8984,9 +8984,9 @@
                 <a:solidFill>
                   <a:srgbClr val="896850"/>
                 </a:solidFill>
-                <a:latin typeface="Karla" pitchFamily="34" charset="0"/>
-                <a:ea typeface="Karla" pitchFamily="34" charset="-122"/>
-                <a:cs typeface="Karla" pitchFamily="34" charset="-120"/>
+                <a:latin typeface="Calibri" pitchFamily="34" charset="0"/>
+                <a:ea typeface="Calibri" pitchFamily="34" charset="-122"/>
+                <a:cs typeface="Calibri" pitchFamily="34" charset="-120"/>
               </a:rPr>
               <a:t>Presentation day</a:t>
             </a:r>
@@ -9023,9 +9023,9 @@
                 <a:solidFill>
                   <a:srgbClr val="A48A70"/>
                 </a:solidFill>
-                <a:latin typeface="Karla" pitchFamily="34" charset="0"/>
-                <a:ea typeface="Karla" pitchFamily="34" charset="-122"/>
-                <a:cs typeface="Karla" pitchFamily="34" charset="-120"/>
+                <a:latin typeface="Calibri" pitchFamily="34" charset="0"/>
+                <a:ea typeface="Calibri" pitchFamily="34" charset="-122"/>
+                <a:cs typeface="Calibri" pitchFamily="34" charset="-120"/>
               </a:rPr>
               <a:t>Session 2: two minutes each, to the form</a:t>
             </a:r>
@@ -9062,9 +9062,9 @@
                 <a:solidFill>
                   <a:srgbClr val="CE6936"/>
                 </a:solidFill>
-                <a:latin typeface="Karla" pitchFamily="34" charset="0"/>
-                <a:ea typeface="Karla" pitchFamily="34" charset="-122"/>
-                <a:cs typeface="Karla" pitchFamily="34" charset="-120"/>
+                <a:latin typeface="Calibri" pitchFamily="34" charset="0"/>
+                <a:ea typeface="Calibri" pitchFamily="34" charset="-122"/>
+                <a:cs typeface="Calibri" pitchFamily="34" charset="-120"/>
               </a:rPr>
               <a:t>A one-week window is the default here. Stretch it to fit your form’s timetable if a week doesn’t give the Lasting Change track enough room to land.</a:t>
             </a:r>
